--- a/slides for class/my slides/conditional-logic.pptx
+++ b/slides for class/my slides/conditional-logic.pptx
@@ -26,6 +26,11 @@
     <p:sldId id="277" r:id="rId20"/>
     <p:sldId id="278" r:id="rId21"/>
     <p:sldId id="279" r:id="rId22"/>
+    <p:sldId id="280" r:id="rId23"/>
+    <p:sldId id="281" r:id="rId24"/>
+    <p:sldId id="282" r:id="rId25"/>
+    <p:sldId id="283" r:id="rId26"/>
+    <p:sldId id="284" r:id="rId27"/>
   </p:sldIdLst>
   <p:sldSz cx="12192000" cy="6858000"/>
   <p:notesSz cx="6858000" cy="9144000"/>
@@ -7633,6 +7638,17 @@
               <a:t>Better than writing a long change of if…else if…else statements when comparing the same value to multiple possibilities </a:t>
             </a:r>
           </a:p>
+          <a:p>
+            <a:pPr>
+              <a:lnSpc>
+                <a:spcPct val="150000"/>
+              </a:lnSpc>
+            </a:pPr>
+            <a:r>
+              <a:rPr lang="en-US" dirty="0"/>
+              <a:t>Best when evaluating more than four or five values</a:t>
+            </a:r>
+          </a:p>
         </p:txBody>
       </p:sp>
     </p:spTree>
@@ -7800,18 +7816,11 @@
               </a:rPr>
             </a:br>
             <a:r>
-              <a:rPr lang="en-US" sz="1600">
-                <a:latin typeface="Courier New" panose="02070309020205020404" pitchFamily="49" charset="0"/>
-                <a:cs typeface="Courier New" panose="02070309020205020404" pitchFamily="49" charset="0"/>
-              </a:rPr>
-              <a:t>    break</a:t>
-            </a:r>
-            <a:r>
               <a:rPr lang="en-US" sz="1600" dirty="0">
                 <a:latin typeface="Courier New" panose="02070309020205020404" pitchFamily="49" charset="0"/>
                 <a:cs typeface="Courier New" panose="02070309020205020404" pitchFamily="49" charset="0"/>
               </a:rPr>
-              <a:t>;</a:t>
+              <a:t>    break;</a:t>
             </a:r>
             <a:br>
               <a:rPr lang="en-US" sz="1600" dirty="0">
@@ -7820,18 +7829,11 @@
               </a:rPr>
             </a:br>
             <a:r>
-              <a:rPr lang="en-US" sz="1600">
-                <a:latin typeface="Courier New" panose="02070309020205020404" pitchFamily="49" charset="0"/>
-                <a:cs typeface="Courier New" panose="02070309020205020404" pitchFamily="49" charset="0"/>
-              </a:rPr>
-              <a:t>  case </a:t>
-            </a:r>
-            <a:r>
               <a:rPr lang="en-US" sz="1600" dirty="0">
                 <a:latin typeface="Courier New" panose="02070309020205020404" pitchFamily="49" charset="0"/>
                 <a:cs typeface="Courier New" panose="02070309020205020404" pitchFamily="49" charset="0"/>
               </a:rPr>
-              <a:t>value-n:</a:t>
+              <a:t>  case value-n:</a:t>
             </a:r>
             <a:br>
               <a:rPr lang="en-US" sz="1600" dirty="0">
@@ -7840,18 +7842,11 @@
               </a:rPr>
             </a:br>
             <a:r>
-              <a:rPr lang="en-US" sz="1600">
-                <a:latin typeface="Courier New" panose="02070309020205020404" pitchFamily="49" charset="0"/>
-                <a:cs typeface="Courier New" panose="02070309020205020404" pitchFamily="49" charset="0"/>
-              </a:rPr>
-              <a:t>    // </a:t>
-            </a:r>
-            <a:r>
               <a:rPr lang="en-US" sz="1600" dirty="0">
                 <a:latin typeface="Courier New" panose="02070309020205020404" pitchFamily="49" charset="0"/>
                 <a:cs typeface="Courier New" panose="02070309020205020404" pitchFamily="49" charset="0"/>
               </a:rPr>
-              <a:t>code to be executed</a:t>
+              <a:t>    // code to be executed</a:t>
             </a:r>
             <a:br>
               <a:rPr lang="en-US" sz="1600" dirty="0">
@@ -7860,18 +7855,11 @@
               </a:rPr>
             </a:br>
             <a:r>
-              <a:rPr lang="en-US" sz="1600">
-                <a:latin typeface="Courier New" panose="02070309020205020404" pitchFamily="49" charset="0"/>
-                <a:cs typeface="Courier New" panose="02070309020205020404" pitchFamily="49" charset="0"/>
-              </a:rPr>
-              <a:t>    break</a:t>
-            </a:r>
-            <a:r>
               <a:rPr lang="en-US" sz="1600" dirty="0">
                 <a:latin typeface="Courier New" panose="02070309020205020404" pitchFamily="49" charset="0"/>
                 <a:cs typeface="Courier New" panose="02070309020205020404" pitchFamily="49" charset="0"/>
               </a:rPr>
-              <a:t>;</a:t>
+              <a:t>    break;</a:t>
             </a:r>
             <a:br>
               <a:rPr lang="en-US" sz="1600" dirty="0">
@@ -7880,18 +7868,11 @@
               </a:rPr>
             </a:br>
             <a:r>
-              <a:rPr lang="en-US" sz="1600">
-                <a:latin typeface="Courier New" panose="02070309020205020404" pitchFamily="49" charset="0"/>
-                <a:cs typeface="Courier New" panose="02070309020205020404" pitchFamily="49" charset="0"/>
-              </a:rPr>
-              <a:t>  default</a:t>
-            </a:r>
-            <a:r>
               <a:rPr lang="en-US" sz="1600" dirty="0">
                 <a:latin typeface="Courier New" panose="02070309020205020404" pitchFamily="49" charset="0"/>
                 <a:cs typeface="Courier New" panose="02070309020205020404" pitchFamily="49" charset="0"/>
               </a:rPr>
-              <a:t>:</a:t>
+              <a:t>  default:</a:t>
             </a:r>
             <a:br>
               <a:rPr lang="en-US" sz="1600" dirty="0">
@@ -7900,18 +7881,11 @@
               </a:rPr>
             </a:br>
             <a:r>
-              <a:rPr lang="en-US" sz="1600">
-                <a:latin typeface="Courier New" panose="02070309020205020404" pitchFamily="49" charset="0"/>
-                <a:cs typeface="Courier New" panose="02070309020205020404" pitchFamily="49" charset="0"/>
-              </a:rPr>
-              <a:t>    // </a:t>
-            </a:r>
-            <a:r>
               <a:rPr lang="en-US" sz="1600" dirty="0">
                 <a:latin typeface="Courier New" panose="02070309020205020404" pitchFamily="49" charset="0"/>
                 <a:cs typeface="Courier New" panose="02070309020205020404" pitchFamily="49" charset="0"/>
               </a:rPr>
-              <a:t>code to be executed when no cases match</a:t>
+              <a:t>    // optional code to be executed when no cases match</a:t>
             </a:r>
             <a:br>
               <a:rPr lang="en-US" sz="1600" dirty="0">
@@ -7920,18 +7894,11 @@
               </a:rPr>
             </a:br>
             <a:r>
-              <a:rPr lang="en-US" sz="1600">
-                <a:latin typeface="Courier New" panose="02070309020205020404" pitchFamily="49" charset="0"/>
-                <a:cs typeface="Courier New" panose="02070309020205020404" pitchFamily="49" charset="0"/>
-              </a:rPr>
-              <a:t>    break</a:t>
-            </a:r>
-            <a:r>
               <a:rPr lang="en-US" sz="1600" dirty="0">
                 <a:latin typeface="Courier New" panose="02070309020205020404" pitchFamily="49" charset="0"/>
                 <a:cs typeface="Courier New" panose="02070309020205020404" pitchFamily="49" charset="0"/>
               </a:rPr>
-              <a:t>;</a:t>
+              <a:t>    break;</a:t>
             </a:r>
             <a:br>
               <a:rPr lang="en-US" sz="1600" dirty="0">
@@ -7953,6 +7920,483 @@
     <p:extLst>
       <p:ext uri="{BB962C8B-B14F-4D97-AF65-F5344CB8AC3E}">
         <p14:creationId xmlns:p14="http://schemas.microsoft.com/office/powerpoint/2010/main" val="3030754739"/>
+      </p:ext>
+    </p:extLst>
+  </p:cSld>
+  <p:clrMapOvr>
+    <a:masterClrMapping/>
+  </p:clrMapOvr>
+</p:sld>
+</file>
+
+<file path=ppt/slides/slide22.xml><?xml version="1.0" encoding="utf-8"?>
+<p:sld xmlns:a="http://schemas.openxmlformats.org/drawingml/2006/main" xmlns:r="http://schemas.openxmlformats.org/officeDocument/2006/relationships" xmlns:p="http://schemas.openxmlformats.org/presentationml/2006/main">
+  <p:cSld>
+    <p:spTree>
+      <p:nvGrpSpPr>
+        <p:cNvPr id="1" name=""/>
+        <p:cNvGrpSpPr/>
+        <p:nvPr/>
+      </p:nvGrpSpPr>
+      <p:grpSpPr>
+        <a:xfrm>
+          <a:off x="0" y="0"/>
+          <a:ext cx="0" cy="0"/>
+          <a:chOff x="0" y="0"/>
+          <a:chExt cx="0" cy="0"/>
+        </a:xfrm>
+      </p:grpSpPr>
+      <p:pic>
+        <p:nvPicPr>
+          <p:cNvPr id="3" name="Picture 2">
+            <a:extLst>
+              <a:ext uri="{FF2B5EF4-FFF2-40B4-BE49-F238E27FC236}">
+                <a16:creationId xmlns:a16="http://schemas.microsoft.com/office/drawing/2014/main" id="{E1B2655C-77C0-96EB-0C70-DD9051F45F51}"/>
+              </a:ext>
+            </a:extLst>
+          </p:cNvPr>
+          <p:cNvPicPr>
+            <a:picLocks noChangeAspect="1"/>
+          </p:cNvPicPr>
+          <p:nvPr/>
+        </p:nvPicPr>
+        <p:blipFill>
+          <a:blip r:embed="rId2"/>
+          <a:stretch>
+            <a:fillRect/>
+          </a:stretch>
+        </p:blipFill>
+        <p:spPr>
+          <a:xfrm>
+            <a:off x="7244413" y="666750"/>
+            <a:ext cx="3759200" cy="5524500"/>
+          </a:xfrm>
+          <a:prstGeom prst="rect">
+            <a:avLst/>
+          </a:prstGeom>
+        </p:spPr>
+      </p:pic>
+      <p:pic>
+        <p:nvPicPr>
+          <p:cNvPr id="5" name="Picture 4">
+            <a:extLst>
+              <a:ext uri="{FF2B5EF4-FFF2-40B4-BE49-F238E27FC236}">
+                <a16:creationId xmlns:a16="http://schemas.microsoft.com/office/drawing/2014/main" id="{A70D3495-20DA-7BBD-5FF6-C9AE2D9F3B1C}"/>
+              </a:ext>
+            </a:extLst>
+          </p:cNvPr>
+          <p:cNvPicPr>
+            <a:picLocks noChangeAspect="1"/>
+          </p:cNvPicPr>
+          <p:nvPr/>
+        </p:nvPicPr>
+        <p:blipFill>
+          <a:blip r:embed="rId3"/>
+          <a:stretch>
+            <a:fillRect/>
+          </a:stretch>
+        </p:blipFill>
+        <p:spPr>
+          <a:xfrm>
+            <a:off x="657277" y="1600200"/>
+            <a:ext cx="4851400" cy="3657600"/>
+          </a:xfrm>
+          <a:prstGeom prst="rect">
+            <a:avLst/>
+          </a:prstGeom>
+        </p:spPr>
+      </p:pic>
+    </p:spTree>
+    <p:extLst>
+      <p:ext uri="{BB962C8B-B14F-4D97-AF65-F5344CB8AC3E}">
+        <p14:creationId xmlns:p14="http://schemas.microsoft.com/office/powerpoint/2010/main" val="373366954"/>
+      </p:ext>
+    </p:extLst>
+  </p:cSld>
+  <p:clrMapOvr>
+    <a:masterClrMapping/>
+  </p:clrMapOvr>
+</p:sld>
+</file>
+
+<file path=ppt/slides/slide23.xml><?xml version="1.0" encoding="utf-8"?>
+<p:sld xmlns:a="http://schemas.openxmlformats.org/drawingml/2006/main" xmlns:r="http://schemas.openxmlformats.org/officeDocument/2006/relationships" xmlns:p="http://schemas.openxmlformats.org/presentationml/2006/main">
+  <p:cSld>
+    <p:spTree>
+      <p:nvGrpSpPr>
+        <p:cNvPr id="1" name=""/>
+        <p:cNvGrpSpPr/>
+        <p:nvPr/>
+      </p:nvGrpSpPr>
+      <p:grpSpPr>
+        <a:xfrm>
+          <a:off x="0" y="0"/>
+          <a:ext cx="0" cy="0"/>
+          <a:chOff x="0" y="0"/>
+          <a:chExt cx="0" cy="0"/>
+        </a:xfrm>
+      </p:grpSpPr>
+      <p:sp>
+        <p:nvSpPr>
+          <p:cNvPr id="2" name="Title 1">
+            <a:extLst>
+              <a:ext uri="{FF2B5EF4-FFF2-40B4-BE49-F238E27FC236}">
+                <a16:creationId xmlns:a16="http://schemas.microsoft.com/office/drawing/2014/main" id="{8C94B1C7-243A-9E53-7598-56448F20C517}"/>
+              </a:ext>
+            </a:extLst>
+          </p:cNvPr>
+          <p:cNvSpPr>
+            <a:spLocks noGrp="1"/>
+          </p:cNvSpPr>
+          <p:nvPr>
+            <p:ph type="title"/>
+          </p:nvPr>
+        </p:nvSpPr>
+        <p:spPr/>
+        <p:txBody>
+          <a:bodyPr/>
+          <a:lstStyle/>
+          <a:p>
+            <a:r>
+              <a:rPr lang="en-US" dirty="0"/>
+              <a:t>Break;</a:t>
+            </a:r>
+          </a:p>
+        </p:txBody>
+      </p:sp>
+      <p:sp>
+        <p:nvSpPr>
+          <p:cNvPr id="3" name="Content Placeholder 2">
+            <a:extLst>
+              <a:ext uri="{FF2B5EF4-FFF2-40B4-BE49-F238E27FC236}">
+                <a16:creationId xmlns:a16="http://schemas.microsoft.com/office/drawing/2014/main" id="{AE34FF06-A8D0-4FFB-397F-63ED2F8F97B5}"/>
+              </a:ext>
+            </a:extLst>
+          </p:cNvPr>
+          <p:cNvSpPr>
+            <a:spLocks noGrp="1"/>
+          </p:cNvSpPr>
+          <p:nvPr>
+            <p:ph idx="1"/>
+          </p:nvPr>
+        </p:nvSpPr>
+        <p:spPr/>
+        <p:txBody>
+          <a:bodyPr/>
+          <a:lstStyle/>
+          <a:p>
+            <a:pPr>
+              <a:lnSpc>
+                <a:spcPct val="150000"/>
+              </a:lnSpc>
+            </a:pPr>
+            <a:r>
+              <a:rPr lang="en-US" dirty="0"/>
+              <a:t>Need </a:t>
+            </a:r>
+            <a:r>
+              <a:rPr lang="en-US" b="1" dirty="0">
+                <a:latin typeface="Courier New" panose="02070309020205020404" pitchFamily="49" charset="0"/>
+                <a:cs typeface="Courier New" panose="02070309020205020404" pitchFamily="49" charset="0"/>
+              </a:rPr>
+              <a:t>break;</a:t>
+            </a:r>
+            <a:r>
+              <a:rPr lang="en-US" dirty="0"/>
+              <a:t> at the end of each case to prevent JavaScript from executing code in the next case also</a:t>
+            </a:r>
+          </a:p>
+          <a:p>
+            <a:pPr lvl="1">
+              <a:lnSpc>
+                <a:spcPct val="150000"/>
+              </a:lnSpc>
+            </a:pPr>
+            <a:r>
+              <a:rPr lang="en-US" dirty="0"/>
+              <a:t>Even though comparison of next value to expression will be false, that code will still be executed if break statement not executed before reaching it</a:t>
+            </a:r>
+          </a:p>
+          <a:p>
+            <a:pPr lvl="1">
+              <a:lnSpc>
+                <a:spcPct val="150000"/>
+              </a:lnSpc>
+            </a:pPr>
+            <a:r>
+              <a:rPr lang="en-US" dirty="0"/>
+              <a:t>If no break statements at all in switch statement, all code for all cases following the matching case will execute</a:t>
+            </a:r>
+          </a:p>
+        </p:txBody>
+      </p:sp>
+    </p:spTree>
+    <p:extLst>
+      <p:ext uri="{BB962C8B-B14F-4D97-AF65-F5344CB8AC3E}">
+        <p14:creationId xmlns:p14="http://schemas.microsoft.com/office/powerpoint/2010/main" val="2550311649"/>
+      </p:ext>
+    </p:extLst>
+  </p:cSld>
+  <p:clrMapOvr>
+    <a:masterClrMapping/>
+  </p:clrMapOvr>
+</p:sld>
+</file>
+
+<file path=ppt/slides/slide24.xml><?xml version="1.0" encoding="utf-8"?>
+<p:sld xmlns:a="http://schemas.openxmlformats.org/drawingml/2006/main" xmlns:r="http://schemas.openxmlformats.org/officeDocument/2006/relationships" xmlns:p="http://schemas.openxmlformats.org/presentationml/2006/main">
+  <p:cSld>
+    <p:spTree>
+      <p:nvGrpSpPr>
+        <p:cNvPr id="1" name=""/>
+        <p:cNvGrpSpPr/>
+        <p:nvPr/>
+      </p:nvGrpSpPr>
+      <p:grpSpPr>
+        <a:xfrm>
+          <a:off x="0" y="0"/>
+          <a:ext cx="0" cy="0"/>
+          <a:chOff x="0" y="0"/>
+          <a:chExt cx="0" cy="0"/>
+        </a:xfrm>
+      </p:grpSpPr>
+      <p:pic>
+        <p:nvPicPr>
+          <p:cNvPr id="3" name="Picture 2">
+            <a:extLst>
+              <a:ext uri="{FF2B5EF4-FFF2-40B4-BE49-F238E27FC236}">
+                <a16:creationId xmlns:a16="http://schemas.microsoft.com/office/drawing/2014/main" id="{255C697D-7EC8-75B0-C9A4-93BE73F79282}"/>
+              </a:ext>
+            </a:extLst>
+          </p:cNvPr>
+          <p:cNvPicPr>
+            <a:picLocks noChangeAspect="1"/>
+          </p:cNvPicPr>
+          <p:nvPr/>
+        </p:nvPicPr>
+        <p:blipFill>
+          <a:blip r:embed="rId2"/>
+          <a:stretch>
+            <a:fillRect/>
+          </a:stretch>
+        </p:blipFill>
+        <p:spPr>
+          <a:xfrm>
+            <a:off x="883795" y="1866900"/>
+            <a:ext cx="4038600" cy="3124200"/>
+          </a:xfrm>
+          <a:prstGeom prst="rect">
+            <a:avLst/>
+          </a:prstGeom>
+        </p:spPr>
+      </p:pic>
+      <p:pic>
+        <p:nvPicPr>
+          <p:cNvPr id="5" name="Picture 4">
+            <a:extLst>
+              <a:ext uri="{FF2B5EF4-FFF2-40B4-BE49-F238E27FC236}">
+                <a16:creationId xmlns:a16="http://schemas.microsoft.com/office/drawing/2014/main" id="{D07B677F-396D-2EFA-916C-5B35DA106040}"/>
+              </a:ext>
+            </a:extLst>
+          </p:cNvPr>
+          <p:cNvPicPr>
+            <a:picLocks noChangeAspect="1"/>
+          </p:cNvPicPr>
+          <p:nvPr/>
+        </p:nvPicPr>
+        <p:blipFill>
+          <a:blip r:embed="rId3"/>
+          <a:stretch>
+            <a:fillRect/>
+          </a:stretch>
+        </p:blipFill>
+        <p:spPr>
+          <a:xfrm>
+            <a:off x="7068383" y="1562100"/>
+            <a:ext cx="4051300" cy="3733800"/>
+          </a:xfrm>
+          <a:prstGeom prst="rect">
+            <a:avLst/>
+          </a:prstGeom>
+        </p:spPr>
+      </p:pic>
+    </p:spTree>
+    <p:extLst>
+      <p:ext uri="{BB962C8B-B14F-4D97-AF65-F5344CB8AC3E}">
+        <p14:creationId xmlns:p14="http://schemas.microsoft.com/office/powerpoint/2010/main" val="2552695360"/>
+      </p:ext>
+    </p:extLst>
+  </p:cSld>
+  <p:clrMapOvr>
+    <a:masterClrMapping/>
+  </p:clrMapOvr>
+</p:sld>
+</file>
+
+<file path=ppt/slides/slide25.xml><?xml version="1.0" encoding="utf-8"?>
+<p:sld xmlns:a="http://schemas.openxmlformats.org/drawingml/2006/main" xmlns:r="http://schemas.openxmlformats.org/officeDocument/2006/relationships" xmlns:p="http://schemas.openxmlformats.org/presentationml/2006/main">
+  <p:cSld>
+    <p:spTree>
+      <p:nvGrpSpPr>
+        <p:cNvPr id="1" name=""/>
+        <p:cNvGrpSpPr/>
+        <p:nvPr/>
+      </p:nvGrpSpPr>
+      <p:grpSpPr>
+        <a:xfrm>
+          <a:off x="0" y="0"/>
+          <a:ext cx="0" cy="0"/>
+          <a:chOff x="0" y="0"/>
+          <a:chExt cx="0" cy="0"/>
+        </a:xfrm>
+      </p:grpSpPr>
+      <p:sp>
+        <p:nvSpPr>
+          <p:cNvPr id="2" name="Title 1">
+            <a:extLst>
+              <a:ext uri="{FF2B5EF4-FFF2-40B4-BE49-F238E27FC236}">
+                <a16:creationId xmlns:a16="http://schemas.microsoft.com/office/drawing/2014/main" id="{CFD80794-1EAE-28E6-4EBD-A5F6D265546A}"/>
+              </a:ext>
+            </a:extLst>
+          </p:cNvPr>
+          <p:cNvSpPr>
+            <a:spLocks noGrp="1"/>
+          </p:cNvSpPr>
+          <p:nvPr>
+            <p:ph type="title"/>
+          </p:nvPr>
+        </p:nvSpPr>
+        <p:spPr/>
+        <p:txBody>
+          <a:bodyPr/>
+          <a:lstStyle/>
+          <a:p>
+            <a:r>
+              <a:rPr lang="en-US" dirty="0"/>
+              <a:t>Default:</a:t>
+            </a:r>
+          </a:p>
+        </p:txBody>
+      </p:sp>
+      <p:sp>
+        <p:nvSpPr>
+          <p:cNvPr id="3" name="Content Placeholder 2">
+            <a:extLst>
+              <a:ext uri="{FF2B5EF4-FFF2-40B4-BE49-F238E27FC236}">
+                <a16:creationId xmlns:a16="http://schemas.microsoft.com/office/drawing/2014/main" id="{D5865231-5782-EC2E-21AA-071902E06D39}"/>
+              </a:ext>
+            </a:extLst>
+          </p:cNvPr>
+          <p:cNvSpPr>
+            <a:spLocks noGrp="1"/>
+          </p:cNvSpPr>
+          <p:nvPr>
+            <p:ph idx="1"/>
+          </p:nvPr>
+        </p:nvSpPr>
+        <p:spPr/>
+        <p:txBody>
+          <a:bodyPr/>
+          <a:lstStyle/>
+          <a:p>
+            <a:pPr>
+              <a:lnSpc>
+                <a:spcPct val="150000"/>
+              </a:lnSpc>
+            </a:pPr>
+            <a:r>
+              <a:rPr lang="en-US" dirty="0"/>
+              <a:t>Optional </a:t>
+            </a:r>
+            <a:r>
+              <a:rPr lang="en-US"/>
+              <a:t>case with code </a:t>
+            </a:r>
+            <a:r>
+              <a:rPr lang="en-US" dirty="0"/>
+              <a:t>that runs when none of the other cases match</a:t>
+            </a:r>
+          </a:p>
+          <a:p>
+            <a:pPr>
+              <a:lnSpc>
+                <a:spcPct val="150000"/>
+              </a:lnSpc>
+            </a:pPr>
+            <a:r>
+              <a:rPr lang="en-US" dirty="0"/>
+              <a:t>Usually goes at the bottom of switch statement, but will still work properly even if at the top or in the middle of statement</a:t>
+            </a:r>
+          </a:p>
+          <a:p>
+            <a:endParaRPr lang="en-US" dirty="0"/>
+          </a:p>
+        </p:txBody>
+      </p:sp>
+    </p:spTree>
+    <p:extLst>
+      <p:ext uri="{BB962C8B-B14F-4D97-AF65-F5344CB8AC3E}">
+        <p14:creationId xmlns:p14="http://schemas.microsoft.com/office/powerpoint/2010/main" val="4446724"/>
+      </p:ext>
+    </p:extLst>
+  </p:cSld>
+  <p:clrMapOvr>
+    <a:masterClrMapping/>
+  </p:clrMapOvr>
+</p:sld>
+</file>
+
+<file path=ppt/slides/slide26.xml><?xml version="1.0" encoding="utf-8"?>
+<p:sld xmlns:a="http://schemas.openxmlformats.org/drawingml/2006/main" xmlns:r="http://schemas.openxmlformats.org/officeDocument/2006/relationships" xmlns:p="http://schemas.openxmlformats.org/presentationml/2006/main">
+  <p:cSld>
+    <p:spTree>
+      <p:nvGrpSpPr>
+        <p:cNvPr id="1" name=""/>
+        <p:cNvGrpSpPr/>
+        <p:nvPr/>
+      </p:nvGrpSpPr>
+      <p:grpSpPr>
+        <a:xfrm>
+          <a:off x="0" y="0"/>
+          <a:ext cx="0" cy="0"/>
+          <a:chOff x="0" y="0"/>
+          <a:chExt cx="0" cy="0"/>
+        </a:xfrm>
+      </p:grpSpPr>
+      <p:pic>
+        <p:nvPicPr>
+          <p:cNvPr id="3" name="Picture 2">
+            <a:extLst>
+              <a:ext uri="{FF2B5EF4-FFF2-40B4-BE49-F238E27FC236}">
+                <a16:creationId xmlns:a16="http://schemas.microsoft.com/office/drawing/2014/main" id="{4AE6DCCC-42C4-93B9-F141-E669E5F46EA2}"/>
+              </a:ext>
+            </a:extLst>
+          </p:cNvPr>
+          <p:cNvPicPr>
+            <a:picLocks noChangeAspect="1"/>
+          </p:cNvPicPr>
+          <p:nvPr/>
+        </p:nvPicPr>
+        <p:blipFill>
+          <a:blip r:embed="rId2"/>
+          <a:stretch>
+            <a:fillRect/>
+          </a:stretch>
+        </p:blipFill>
+        <p:spPr>
+          <a:xfrm>
+            <a:off x="4070350" y="1149350"/>
+            <a:ext cx="4051300" cy="4559300"/>
+          </a:xfrm>
+          <a:prstGeom prst="rect">
+            <a:avLst/>
+          </a:prstGeom>
+        </p:spPr>
+      </p:pic>
+    </p:spTree>
+    <p:extLst>
+      <p:ext uri="{BB962C8B-B14F-4D97-AF65-F5344CB8AC3E}">
+        <p14:creationId xmlns:p14="http://schemas.microsoft.com/office/powerpoint/2010/main" val="1079416748"/>
       </p:ext>
     </p:extLst>
   </p:cSld>
